--- a/Презентация проекта.pptx
+++ b/Презентация проекта.pptx
@@ -7,8 +7,8 @@
   <p:sldIdLst>
     <p:sldId id="256" r:id="rId7"/>
     <p:sldId id="257" r:id="rId8"/>
-    <p:sldId id="258" r:id="rId9"/>
-    <p:sldId id="259" r:id="rId10"/>
+    <p:sldId id="263" r:id="rId14"/>
+    <p:sldId id="264" r:id="rId15"/>
     <p:sldId id="260" r:id="rId11"/>
     <p:sldId id="261" r:id="rId12"/>
     <p:sldId id="262" r:id="rId13"/>
@@ -3836,1236 +3836,6 @@
 </p:sld>
 </file>
 
-<file path=ppt/slides/slide3.xml><?xml version="1.0" encoding="utf-8"?>
-<p:sld xmlns:a="http://schemas.openxmlformats.org/drawingml/2006/main" xmlns:p="http://schemas.openxmlformats.org/presentationml/2006/main" xmlns:r="http://schemas.openxmlformats.org/officeDocument/2006/relationships">
-  <p:cSld>
-    <p:spTree>
-      <p:nvGrpSpPr>
-        <p:cNvPr id="1" name=""/>
-        <p:cNvGrpSpPr/>
-        <p:nvPr/>
-      </p:nvGrpSpPr>
-      <p:grpSpPr/>
-      <p:sp>
-        <p:nvSpPr>
-          <p:cNvPr id="2" name="Rectangle 1"/>
-          <p:cNvSpPr/>
-          <p:nvPr/>
-        </p:nvSpPr>
-        <p:spPr>
-          <a:xfrm>
-            <a:off x="0" y="0"/>
-            <a:ext cx="12191695" cy="6858000"/>
-          </a:xfrm>
-          <a:prstGeom prst="rect">
-            <a:avLst/>
-          </a:prstGeom>
-          <a:solidFill>
-            <a:srgbClr val="FFFFFF"/>
-          </a:solidFill>
-          <a:ln>
-            <a:noFill/>
-          </a:ln>
-          <a:effectLst/>
-        </p:spPr>
-        <p:style>
-          <a:lnRef idx="1">
-            <a:schemeClr val="accent1"/>
-          </a:lnRef>
-          <a:fillRef idx="3">
-            <a:schemeClr val="accent1"/>
-          </a:fillRef>
-          <a:effectRef idx="2">
-            <a:schemeClr val="accent1"/>
-          </a:effectRef>
-          <a:fontRef idx="minor">
-            <a:schemeClr val="lt1"/>
-          </a:fontRef>
-        </p:style>
-        <p:txBody>
-          <a:bodyPr rtlCol="0" anchor="ctr"/>
-          <a:lstStyle/>
-          <a:p>
-            <a:pPr algn="ctr"/>
-          </a:p>
-        </p:txBody>
-      </p:sp>
-      <p:sp>
-        <p:nvSpPr>
-          <p:cNvPr id="3" name="Rectangle 2"/>
-          <p:cNvSpPr/>
-          <p:nvPr/>
-        </p:nvSpPr>
-        <p:spPr>
-          <a:xfrm>
-            <a:off x="0" y="0"/>
-            <a:ext cx="12191695" cy="1371600"/>
-          </a:xfrm>
-          <a:prstGeom prst="rect">
-            <a:avLst/>
-          </a:prstGeom>
-          <a:solidFill>
-            <a:srgbClr val="2563EB"/>
-          </a:solidFill>
-          <a:ln>
-            <a:noFill/>
-          </a:ln>
-          <a:effectLst/>
-        </p:spPr>
-        <p:style>
-          <a:lnRef idx="1">
-            <a:schemeClr val="accent1"/>
-          </a:lnRef>
-          <a:fillRef idx="3">
-            <a:schemeClr val="accent1"/>
-          </a:fillRef>
-          <a:effectRef idx="2">
-            <a:schemeClr val="accent1"/>
-          </a:effectRef>
-          <a:fontRef idx="minor">
-            <a:schemeClr val="lt1"/>
-          </a:fontRef>
-        </p:style>
-        <p:txBody>
-          <a:bodyPr rtlCol="0" anchor="ctr"/>
-          <a:lstStyle/>
-          <a:p>
-            <a:pPr algn="ctr"/>
-          </a:p>
-        </p:txBody>
-      </p:sp>
-      <p:sp>
-        <p:nvSpPr>
-          <p:cNvPr id="4" name="Rectangle 3"/>
-          <p:cNvSpPr/>
-          <p:nvPr/>
-        </p:nvSpPr>
-        <p:spPr>
-          <a:xfrm>
-            <a:off x="0" y="1371600"/>
-            <a:ext cx="12191695" cy="50800"/>
-          </a:xfrm>
-          <a:prstGeom prst="rect">
-            <a:avLst/>
-          </a:prstGeom>
-          <a:solidFill>
-            <a:srgbClr val="1D4ED8"/>
-          </a:solidFill>
-          <a:ln>
-            <a:noFill/>
-          </a:ln>
-          <a:effectLst/>
-        </p:spPr>
-        <p:style>
-          <a:lnRef idx="1">
-            <a:schemeClr val="accent1"/>
-          </a:lnRef>
-          <a:fillRef idx="3">
-            <a:schemeClr val="accent1"/>
-          </a:fillRef>
-          <a:effectRef idx="2">
-            <a:schemeClr val="accent1"/>
-          </a:effectRef>
-          <a:fontRef idx="minor">
-            <a:schemeClr val="lt1"/>
-          </a:fontRef>
-        </p:style>
-        <p:txBody>
-          <a:bodyPr rtlCol="0" anchor="ctr"/>
-          <a:lstStyle/>
-          <a:p>
-            <a:pPr algn="ctr"/>
-          </a:p>
-        </p:txBody>
-      </p:sp>
-      <p:sp>
-        <p:nvSpPr>
-          <p:cNvPr id="5" name="TextBox 4"/>
-          <p:cNvSpPr txBox="1"/>
-          <p:nvPr/>
-        </p:nvSpPr>
-        <p:spPr>
-          <a:xfrm>
-            <a:off x="640080" y="256032"/>
-            <a:ext cx="10972800" cy="914400"/>
-          </a:xfrm>
-          <a:prstGeom prst="rect">
-            <a:avLst/>
-          </a:prstGeom>
-          <a:noFill/>
-        </p:spPr>
-        <p:txBody>
-          <a:bodyPr wrap="square" anchor="t" lIns="0" rIns="0" tIns="0" bIns="0">
-            <a:spAutoFit/>
-          </a:bodyPr>
-          <a:lstStyle/>
-          <a:p>
-            <a:pPr algn="l">
-              <a:spcAft>
-                <a:spcPts val="200"/>
-              </a:spcAft>
-            </a:pPr>
-            <a:r>
-              <a:rPr sz="1200" b="1" i="0">
-                <a:solidFill>
-                  <a:srgbClr val="BFD3FF"/>
-                </a:solidFill>
-                <a:latin typeface="Segoe UI"/>
-              </a:rPr>
-              <a:t>РЕШЕНИЕ</a:t>
-            </a:r>
-          </a:p>
-          <a:p>
-            <a:pPr algn="l">
-              <a:spcAft>
-                <a:spcPts val="0"/>
-              </a:spcAft>
-            </a:pPr>
-            <a:r>
-              <a:rPr sz="3000" b="1" i="0">
-                <a:solidFill>
-                  <a:srgbClr val="FFFFFF"/>
-                </a:solidFill>
-                <a:latin typeface="Segoe UI"/>
-              </a:rPr>
-              <a:t>Архитектура и технологии</a:t>
-            </a:r>
-          </a:p>
-        </p:txBody>
-      </p:sp>
-      <p:sp>
-        <p:nvSpPr>
-          <p:cNvPr id="6" name="Rounded Rectangle 5"/>
-          <p:cNvSpPr/>
-          <p:nvPr/>
-        </p:nvSpPr>
-        <p:spPr>
-          <a:xfrm>
-            <a:off x="640080" y="1965960"/>
-            <a:ext cx="2468880" cy="1051560"/>
-          </a:xfrm>
-          <a:prstGeom prst="roundRect">
-            <a:avLst/>
-          </a:prstGeom>
-          <a:solidFill>
-            <a:srgbClr val="2563EB"/>
-          </a:solidFill>
-          <a:ln>
-            <a:noFill/>
-          </a:ln>
-          <a:effectLst/>
-        </p:spPr>
-        <p:style>
-          <a:lnRef idx="1">
-            <a:schemeClr val="accent1"/>
-          </a:lnRef>
-          <a:fillRef idx="3">
-            <a:schemeClr val="accent1"/>
-          </a:fillRef>
-          <a:effectRef idx="2">
-            <a:schemeClr val="accent1"/>
-          </a:effectRef>
-          <a:fontRef idx="minor">
-            <a:schemeClr val="lt1"/>
-          </a:fontRef>
-        </p:style>
-        <p:txBody>
-          <a:bodyPr rtlCol="0" anchor="ctr" wrap="square"/>
-          <a:lstStyle/>
-          <a:p>
-            <a:pPr algn="ctr"/>
-            <a:r>
-              <a:rPr sz="1400" b="1" i="0">
-                <a:solidFill>
-                  <a:srgbClr val="FFFFFF"/>
-                </a:solidFill>
-                <a:latin typeface="Segoe UI"/>
-              </a:rPr>
-              <a:t>Frontend</a:t>
-            </a:r>
-          </a:p>
-          <a:p>
-            <a:pPr algn="ctr"/>
-            <a:r>
-              <a:rPr sz="1050" b="0" i="0">
-                <a:solidFill>
-                  <a:srgbClr val="E0E7FF"/>
-                </a:solidFill>
-                <a:latin typeface="Segoe UI"/>
-              </a:rPr>
-              <a:t>React + TS · Nginx</a:t>
-            </a:r>
-          </a:p>
-        </p:txBody>
-      </p:sp>
-      <p:sp>
-        <p:nvSpPr>
-          <p:cNvPr id="7" name="Rounded Rectangle 6"/>
-          <p:cNvSpPr/>
-          <p:nvPr/>
-        </p:nvSpPr>
-        <p:spPr>
-          <a:xfrm>
-            <a:off x="3566160" y="1965960"/>
-            <a:ext cx="2468880" cy="1051560"/>
-          </a:xfrm>
-          <a:prstGeom prst="roundRect">
-            <a:avLst/>
-          </a:prstGeom>
-          <a:solidFill>
-            <a:srgbClr val="1D4ED8"/>
-          </a:solidFill>
-          <a:ln>
-            <a:noFill/>
-          </a:ln>
-          <a:effectLst/>
-        </p:spPr>
-        <p:style>
-          <a:lnRef idx="1">
-            <a:schemeClr val="accent1"/>
-          </a:lnRef>
-          <a:fillRef idx="3">
-            <a:schemeClr val="accent1"/>
-          </a:fillRef>
-          <a:effectRef idx="2">
-            <a:schemeClr val="accent1"/>
-          </a:effectRef>
-          <a:fontRef idx="minor">
-            <a:schemeClr val="lt1"/>
-          </a:fontRef>
-        </p:style>
-        <p:txBody>
-          <a:bodyPr rtlCol="0" anchor="ctr" wrap="square"/>
-          <a:lstStyle/>
-          <a:p>
-            <a:pPr algn="ctr"/>
-            <a:r>
-              <a:rPr sz="1400" b="1" i="0">
-                <a:solidFill>
-                  <a:srgbClr val="FFFFFF"/>
-                </a:solidFill>
-                <a:latin typeface="Segoe UI"/>
-              </a:rPr>
-              <a:t>Backend API</a:t>
-            </a:r>
-          </a:p>
-          <a:p>
-            <a:pPr algn="ctr"/>
-            <a:r>
-              <a:rPr sz="1050" b="0" i="0">
-                <a:solidFill>
-                  <a:srgbClr val="E0E7FF"/>
-                </a:solidFill>
-                <a:latin typeface="Segoe UI"/>
-              </a:rPr>
-              <a:t>FastAPI (Python)</a:t>
-            </a:r>
-          </a:p>
-        </p:txBody>
-      </p:sp>
-      <p:sp>
-        <p:nvSpPr>
-          <p:cNvPr id="8" name="Rounded Rectangle 7"/>
-          <p:cNvSpPr/>
-          <p:nvPr/>
-        </p:nvSpPr>
-        <p:spPr>
-          <a:xfrm>
-            <a:off x="6492240" y="1965960"/>
-            <a:ext cx="5029200" cy="658368"/>
-          </a:xfrm>
-          <a:prstGeom prst="roundRect">
-            <a:avLst/>
-          </a:prstGeom>
-          <a:solidFill>
-            <a:srgbClr val="F4F6FB"/>
-          </a:solidFill>
-          <a:ln>
-            <a:noFill/>
-          </a:ln>
-          <a:effectLst/>
-        </p:spPr>
-        <p:style>
-          <a:lnRef idx="1">
-            <a:schemeClr val="accent1"/>
-          </a:lnRef>
-          <a:fillRef idx="3">
-            <a:schemeClr val="accent1"/>
-          </a:fillRef>
-          <a:effectRef idx="2">
-            <a:schemeClr val="accent1"/>
-          </a:effectRef>
-          <a:fontRef idx="minor">
-            <a:schemeClr val="lt1"/>
-          </a:fontRef>
-        </p:style>
-        <p:txBody>
-          <a:bodyPr rtlCol="0" anchor="ctr" wrap="square"/>
-          <a:lstStyle/>
-          <a:p>
-            <a:pPr algn="ctr"/>
-            <a:r>
-              <a:rPr sz="1400" b="1" i="0">
-                <a:solidFill>
-                  <a:srgbClr val="1F2430"/>
-                </a:solidFill>
-                <a:latin typeface="Segoe UI"/>
-              </a:rPr>
-              <a:t>PostgreSQL</a:t>
-            </a:r>
-          </a:p>
-          <a:p>
-            <a:pPr algn="ctr"/>
-            <a:r>
-              <a:rPr sz="1050" b="0" i="0">
-                <a:solidFill>
-                  <a:srgbClr val="6B7280"/>
-                </a:solidFill>
-                <a:latin typeface="Segoe UI"/>
-              </a:rPr>
-              <a:t>метаданные, история</a:t>
-            </a:r>
-          </a:p>
-        </p:txBody>
-      </p:sp>
-      <p:sp>
-        <p:nvSpPr>
-          <p:cNvPr id="9" name="Rounded Rectangle 8"/>
-          <p:cNvSpPr/>
-          <p:nvPr/>
-        </p:nvSpPr>
-        <p:spPr>
-          <a:xfrm>
-            <a:off x="6492240" y="2788920"/>
-            <a:ext cx="5029200" cy="658368"/>
-          </a:xfrm>
-          <a:prstGeom prst="roundRect">
-            <a:avLst/>
-          </a:prstGeom>
-          <a:solidFill>
-            <a:srgbClr val="F4F6FB"/>
-          </a:solidFill>
-          <a:ln>
-            <a:noFill/>
-          </a:ln>
-          <a:effectLst/>
-        </p:spPr>
-        <p:style>
-          <a:lnRef idx="1">
-            <a:schemeClr val="accent1"/>
-          </a:lnRef>
-          <a:fillRef idx="3">
-            <a:schemeClr val="accent1"/>
-          </a:fillRef>
-          <a:effectRef idx="2">
-            <a:schemeClr val="accent1"/>
-          </a:effectRef>
-          <a:fontRef idx="minor">
-            <a:schemeClr val="lt1"/>
-          </a:fontRef>
-        </p:style>
-        <p:txBody>
-          <a:bodyPr rtlCol="0" anchor="ctr" wrap="square"/>
-          <a:lstStyle/>
-          <a:p>
-            <a:pPr algn="ctr"/>
-            <a:r>
-              <a:rPr sz="1400" b="1" i="0">
-                <a:solidFill>
-                  <a:srgbClr val="1F2430"/>
-                </a:solidFill>
-                <a:latin typeface="Segoe UI"/>
-              </a:rPr>
-              <a:t>Elasticsearch</a:t>
-            </a:r>
-          </a:p>
-          <a:p>
-            <a:pPr algn="ctr"/>
-            <a:r>
-              <a:rPr sz="1050" b="0" i="0">
-                <a:solidFill>
-                  <a:srgbClr val="6B7280"/>
-                </a:solidFill>
-                <a:latin typeface="Segoe UI"/>
-              </a:rPr>
-              <a:t>полнотекстовый поиск</a:t>
-            </a:r>
-          </a:p>
-        </p:txBody>
-      </p:sp>
-      <p:sp>
-        <p:nvSpPr>
-          <p:cNvPr id="10" name="Rounded Rectangle 9"/>
-          <p:cNvSpPr/>
-          <p:nvPr/>
-        </p:nvSpPr>
-        <p:spPr>
-          <a:xfrm>
-            <a:off x="6492240" y="3611880"/>
-            <a:ext cx="5029200" cy="658368"/>
-          </a:xfrm>
-          <a:prstGeom prst="roundRect">
-            <a:avLst/>
-          </a:prstGeom>
-          <a:solidFill>
-            <a:srgbClr val="F4F6FB"/>
-          </a:solidFill>
-          <a:ln>
-            <a:noFill/>
-          </a:ln>
-          <a:effectLst/>
-        </p:spPr>
-        <p:style>
-          <a:lnRef idx="1">
-            <a:schemeClr val="accent1"/>
-          </a:lnRef>
-          <a:fillRef idx="3">
-            <a:schemeClr val="accent1"/>
-          </a:fillRef>
-          <a:effectRef idx="2">
-            <a:schemeClr val="accent1"/>
-          </a:effectRef>
-          <a:fontRef idx="minor">
-            <a:schemeClr val="lt1"/>
-          </a:fontRef>
-        </p:style>
-        <p:txBody>
-          <a:bodyPr rtlCol="0" anchor="ctr" wrap="square"/>
-          <a:lstStyle/>
-          <a:p>
-            <a:pPr algn="ctr"/>
-            <a:r>
-              <a:rPr sz="1400" b="1" i="0">
-                <a:solidFill>
-                  <a:srgbClr val="1F2430"/>
-                </a:solidFill>
-                <a:latin typeface="Segoe UI"/>
-              </a:rPr>
-              <a:t>Redis</a:t>
-            </a:r>
-          </a:p>
-          <a:p>
-            <a:pPr algn="ctr"/>
-            <a:r>
-              <a:rPr sz="1050" b="0" i="0">
-                <a:solidFill>
-                  <a:srgbClr val="6B7280"/>
-                </a:solidFill>
-                <a:latin typeface="Segoe UI"/>
-              </a:rPr>
-              <a:t>кеш запросов</a:t>
-            </a:r>
-          </a:p>
-        </p:txBody>
-      </p:sp>
-      <p:sp>
-        <p:nvSpPr>
-          <p:cNvPr id="11" name="Right Arrow 10"/>
-          <p:cNvSpPr/>
-          <p:nvPr/>
-        </p:nvSpPr>
-        <p:spPr>
-          <a:xfrm>
-            <a:off x="3127248" y="2404872"/>
-            <a:ext cx="402336" cy="164592"/>
-          </a:xfrm>
-          <a:prstGeom prst="rightArrow">
-            <a:avLst/>
-          </a:prstGeom>
-          <a:solidFill>
-            <a:srgbClr val="6B7280"/>
-          </a:solidFill>
-          <a:ln>
-            <a:noFill/>
-          </a:ln>
-          <a:effectLst/>
-        </p:spPr>
-        <p:style>
-          <a:lnRef idx="1">
-            <a:schemeClr val="accent1"/>
-          </a:lnRef>
-          <a:fillRef idx="3">
-            <a:schemeClr val="accent1"/>
-          </a:fillRef>
-          <a:effectRef idx="2">
-            <a:schemeClr val="accent1"/>
-          </a:effectRef>
-          <a:fontRef idx="minor">
-            <a:schemeClr val="lt1"/>
-          </a:fontRef>
-        </p:style>
-        <p:txBody>
-          <a:bodyPr rtlCol="0" anchor="ctr"/>
-          <a:lstStyle/>
-          <a:p>
-            <a:pPr algn="ctr"/>
-          </a:p>
-        </p:txBody>
-      </p:sp>
-      <p:sp>
-        <p:nvSpPr>
-          <p:cNvPr id="12" name="Right Arrow 11"/>
-          <p:cNvSpPr/>
-          <p:nvPr/>
-        </p:nvSpPr>
-        <p:spPr>
-          <a:xfrm>
-            <a:off x="6053328" y="2404872"/>
-            <a:ext cx="402336" cy="164592"/>
-          </a:xfrm>
-          <a:prstGeom prst="rightArrow">
-            <a:avLst/>
-          </a:prstGeom>
-          <a:solidFill>
-            <a:srgbClr val="6B7280"/>
-          </a:solidFill>
-          <a:ln>
-            <a:noFill/>
-          </a:ln>
-          <a:effectLst/>
-        </p:spPr>
-        <p:style>
-          <a:lnRef idx="1">
-            <a:schemeClr val="accent1"/>
-          </a:lnRef>
-          <a:fillRef idx="3">
-            <a:schemeClr val="accent1"/>
-          </a:fillRef>
-          <a:effectRef idx="2">
-            <a:schemeClr val="accent1"/>
-          </a:effectRef>
-          <a:fontRef idx="minor">
-            <a:schemeClr val="lt1"/>
-          </a:fontRef>
-        </p:style>
-        <p:txBody>
-          <a:bodyPr rtlCol="0" anchor="ctr"/>
-          <a:lstStyle/>
-          <a:p>
-            <a:pPr algn="ctr"/>
-          </a:p>
-        </p:txBody>
-      </p:sp>
-      <p:sp>
-        <p:nvSpPr>
-          <p:cNvPr id="13" name="Rounded Rectangle 12"/>
-          <p:cNvSpPr/>
-          <p:nvPr/>
-        </p:nvSpPr>
-        <p:spPr>
-          <a:xfrm>
-            <a:off x="3566160" y="3429000"/>
-            <a:ext cx="2468880" cy="731520"/>
-          </a:xfrm>
-          <a:prstGeom prst="roundRect">
-            <a:avLst/>
-          </a:prstGeom>
-          <a:solidFill>
-            <a:srgbClr val="166534"/>
-          </a:solidFill>
-          <a:ln>
-            <a:noFill/>
-          </a:ln>
-          <a:effectLst/>
-        </p:spPr>
-        <p:style>
-          <a:lnRef idx="1">
-            <a:schemeClr val="accent1"/>
-          </a:lnRef>
-          <a:fillRef idx="3">
-            <a:schemeClr val="accent1"/>
-          </a:fillRef>
-          <a:effectRef idx="2">
-            <a:schemeClr val="accent1"/>
-          </a:effectRef>
-          <a:fontRef idx="minor">
-            <a:schemeClr val="lt1"/>
-          </a:fontRef>
-        </p:style>
-        <p:txBody>
-          <a:bodyPr rtlCol="0" anchor="ctr" wrap="square"/>
-          <a:lstStyle/>
-          <a:p>
-            <a:pPr algn="ctr"/>
-            <a:r>
-              <a:rPr sz="1400" b="1" i="0">
-                <a:solidFill>
-                  <a:srgbClr val="FFFFFF"/>
-                </a:solidFill>
-                <a:latin typeface="Segoe UI"/>
-              </a:rPr>
-              <a:t>Prometheus + Grafana</a:t>
-            </a:r>
-          </a:p>
-          <a:p>
-            <a:pPr algn="ctr"/>
-            <a:r>
-              <a:rPr sz="1050" b="0" i="0">
-                <a:solidFill>
-                  <a:srgbClr val="E0E7FF"/>
-                </a:solidFill>
-                <a:latin typeface="Segoe UI"/>
-              </a:rPr>
-              <a:t>мониторинг</a:t>
-            </a:r>
-          </a:p>
-        </p:txBody>
-      </p:sp>
-      <p:sp>
-        <p:nvSpPr>
-          <p:cNvPr id="14" name="Rectangle 13"/>
-          <p:cNvSpPr/>
-          <p:nvPr/>
-        </p:nvSpPr>
-        <p:spPr>
-          <a:xfrm>
-            <a:off x="640080" y="4572000"/>
-            <a:ext cx="10881360" cy="19050"/>
-          </a:xfrm>
-          <a:prstGeom prst="rect">
-            <a:avLst/>
-          </a:prstGeom>
-          <a:solidFill>
-            <a:srgbClr val="E2E6EF"/>
-          </a:solidFill>
-          <a:ln>
-            <a:noFill/>
-          </a:ln>
-          <a:effectLst/>
-        </p:spPr>
-        <p:style>
-          <a:lnRef idx="1">
-            <a:schemeClr val="accent1"/>
-          </a:lnRef>
-          <a:fillRef idx="3">
-            <a:schemeClr val="accent1"/>
-          </a:fillRef>
-          <a:effectRef idx="2">
-            <a:schemeClr val="accent1"/>
-          </a:effectRef>
-          <a:fontRef idx="minor">
-            <a:schemeClr val="lt1"/>
-          </a:fontRef>
-        </p:style>
-        <p:txBody>
-          <a:bodyPr rtlCol="0" anchor="ctr"/>
-          <a:lstStyle/>
-          <a:p>
-            <a:pPr algn="ctr"/>
-          </a:p>
-        </p:txBody>
-      </p:sp>
-      <p:sp>
-        <p:nvSpPr>
-          <p:cNvPr id="15" name="TextBox 14"/>
-          <p:cNvSpPr txBox="1"/>
-          <p:nvPr/>
-        </p:nvSpPr>
-        <p:spPr>
-          <a:xfrm>
-            <a:off x="640080" y="4754880"/>
-            <a:ext cx="10881360" cy="1737360"/>
-          </a:xfrm>
-          <a:prstGeom prst="rect">
-            <a:avLst/>
-          </a:prstGeom>
-          <a:noFill/>
-        </p:spPr>
-        <p:txBody>
-          <a:bodyPr wrap="square" anchor="t" lIns="0" rIns="0" tIns="0" bIns="0">
-            <a:spAutoFit/>
-          </a:bodyPr>
-          <a:lstStyle/>
-          <a:p>
-            <a:pPr algn="l">
-              <a:spcAft>
-                <a:spcPts val="800"/>
-              </a:spcAft>
-            </a:pPr>
-            <a:r>
-              <a:rPr sz="1200" b="1" i="0">
-                <a:solidFill>
-                  <a:srgbClr val="2563EB"/>
-                </a:solidFill>
-                <a:latin typeface="Segoe UI"/>
-              </a:rPr>
-              <a:t>ТЕХНОЛОГИЧЕСКИЙ СТЕК</a:t>
-            </a:r>
-          </a:p>
-          <a:p>
-            <a:pPr algn="l">
-              <a:spcAft>
-                <a:spcPts val="500"/>
-              </a:spcAft>
-            </a:pPr>
-            <a:r>
-              <a:rPr sz="1500" b="0" i="0">
-                <a:solidFill>
-                  <a:srgbClr val="1F2430"/>
-                </a:solidFill>
-                <a:latin typeface="Segoe UI"/>
-              </a:rPr>
-              <a:t>Python · FastAPI · PostgreSQL · Elasticsearch · Redis · TypeScript · React · Vite · Nginx</a:t>
-            </a:r>
-          </a:p>
-          <a:p>
-            <a:pPr algn="l">
-              <a:spcAft>
-                <a:spcPts val="600"/>
-              </a:spcAft>
-            </a:pPr>
-            <a:r>
-              <a:rPr sz="1500" b="0" i="0">
-                <a:solidFill>
-                  <a:srgbClr val="1F2430"/>
-                </a:solidFill>
-                <a:latin typeface="Segoe UI"/>
-              </a:rPr>
-              <a:t>Docker · Docker Compose · GitHub Actions · Prometheus · Grafana · pytest · Playwright · Locust</a:t>
-            </a:r>
-          </a:p>
-        </p:txBody>
-      </p:sp>
-    </p:spTree>
-  </p:cSld>
-  <p:clrMapOvr>
-    <a:masterClrMapping/>
-  </p:clrMapOvr>
-</p:sld>
-</file>
-
-<file path=ppt/slides/slide4.xml><?xml version="1.0" encoding="utf-8"?>
-<p:sld xmlns:a="http://schemas.openxmlformats.org/drawingml/2006/main" xmlns:p="http://schemas.openxmlformats.org/presentationml/2006/main" xmlns:r="http://schemas.openxmlformats.org/officeDocument/2006/relationships">
-  <p:cSld>
-    <p:spTree>
-      <p:nvGrpSpPr>
-        <p:cNvPr id="1" name=""/>
-        <p:cNvGrpSpPr/>
-        <p:nvPr/>
-      </p:nvGrpSpPr>
-      <p:grpSpPr/>
-      <p:sp>
-        <p:nvSpPr>
-          <p:cNvPr id="2" name="Rectangle 1"/>
-          <p:cNvSpPr/>
-          <p:nvPr/>
-        </p:nvSpPr>
-        <p:spPr>
-          <a:xfrm>
-            <a:off x="0" y="0"/>
-            <a:ext cx="12191695" cy="6858000"/>
-          </a:xfrm>
-          <a:prstGeom prst="rect">
-            <a:avLst/>
-          </a:prstGeom>
-          <a:solidFill>
-            <a:srgbClr val="FFFFFF"/>
-          </a:solidFill>
-          <a:ln>
-            <a:noFill/>
-          </a:ln>
-          <a:effectLst/>
-        </p:spPr>
-        <p:style>
-          <a:lnRef idx="1">
-            <a:schemeClr val="accent1"/>
-          </a:lnRef>
-          <a:fillRef idx="3">
-            <a:schemeClr val="accent1"/>
-          </a:fillRef>
-          <a:effectRef idx="2">
-            <a:schemeClr val="accent1"/>
-          </a:effectRef>
-          <a:fontRef idx="minor">
-            <a:schemeClr val="lt1"/>
-          </a:fontRef>
-        </p:style>
-        <p:txBody>
-          <a:bodyPr rtlCol="0" anchor="ctr"/>
-          <a:lstStyle/>
-          <a:p>
-            <a:pPr algn="ctr"/>
-          </a:p>
-        </p:txBody>
-      </p:sp>
-      <p:sp>
-        <p:nvSpPr>
-          <p:cNvPr id="3" name="Rectangle 2"/>
-          <p:cNvSpPr/>
-          <p:nvPr/>
-        </p:nvSpPr>
-        <p:spPr>
-          <a:xfrm>
-            <a:off x="0" y="0"/>
-            <a:ext cx="12191695" cy="1371600"/>
-          </a:xfrm>
-          <a:prstGeom prst="rect">
-            <a:avLst/>
-          </a:prstGeom>
-          <a:solidFill>
-            <a:srgbClr val="2563EB"/>
-          </a:solidFill>
-          <a:ln>
-            <a:noFill/>
-          </a:ln>
-          <a:effectLst/>
-        </p:spPr>
-        <p:style>
-          <a:lnRef idx="1">
-            <a:schemeClr val="accent1"/>
-          </a:lnRef>
-          <a:fillRef idx="3">
-            <a:schemeClr val="accent1"/>
-          </a:fillRef>
-          <a:effectRef idx="2">
-            <a:schemeClr val="accent1"/>
-          </a:effectRef>
-          <a:fontRef idx="minor">
-            <a:schemeClr val="lt1"/>
-          </a:fontRef>
-        </p:style>
-        <p:txBody>
-          <a:bodyPr rtlCol="0" anchor="ctr"/>
-          <a:lstStyle/>
-          <a:p>
-            <a:pPr algn="ctr"/>
-          </a:p>
-        </p:txBody>
-      </p:sp>
-      <p:sp>
-        <p:nvSpPr>
-          <p:cNvPr id="4" name="Rectangle 3"/>
-          <p:cNvSpPr/>
-          <p:nvPr/>
-        </p:nvSpPr>
-        <p:spPr>
-          <a:xfrm>
-            <a:off x="0" y="1371600"/>
-            <a:ext cx="12191695" cy="50800"/>
-          </a:xfrm>
-          <a:prstGeom prst="rect">
-            <a:avLst/>
-          </a:prstGeom>
-          <a:solidFill>
-            <a:srgbClr val="1D4ED8"/>
-          </a:solidFill>
-          <a:ln>
-            <a:noFill/>
-          </a:ln>
-          <a:effectLst/>
-        </p:spPr>
-        <p:style>
-          <a:lnRef idx="1">
-            <a:schemeClr val="accent1"/>
-          </a:lnRef>
-          <a:fillRef idx="3">
-            <a:schemeClr val="accent1"/>
-          </a:fillRef>
-          <a:effectRef idx="2">
-            <a:schemeClr val="accent1"/>
-          </a:effectRef>
-          <a:fontRef idx="minor">
-            <a:schemeClr val="lt1"/>
-          </a:fontRef>
-        </p:style>
-        <p:txBody>
-          <a:bodyPr rtlCol="0" anchor="ctr"/>
-          <a:lstStyle/>
-          <a:p>
-            <a:pPr algn="ctr"/>
-          </a:p>
-        </p:txBody>
-      </p:sp>
-      <p:sp>
-        <p:nvSpPr>
-          <p:cNvPr id="5" name="TextBox 4"/>
-          <p:cNvSpPr txBox="1"/>
-          <p:nvPr/>
-        </p:nvSpPr>
-        <p:spPr>
-          <a:xfrm>
-            <a:off x="640080" y="256032"/>
-            <a:ext cx="10972800" cy="914400"/>
-          </a:xfrm>
-          <a:prstGeom prst="rect">
-            <a:avLst/>
-          </a:prstGeom>
-          <a:noFill/>
-        </p:spPr>
-        <p:txBody>
-          <a:bodyPr wrap="square" anchor="t" lIns="0" rIns="0" tIns="0" bIns="0">
-            <a:spAutoFit/>
-          </a:bodyPr>
-          <a:lstStyle/>
-          <a:p>
-            <a:pPr algn="l">
-              <a:spcAft>
-                <a:spcPts val="200"/>
-              </a:spcAft>
-            </a:pPr>
-            <a:r>
-              <a:rPr sz="1200" b="1" i="0">
-                <a:solidFill>
-                  <a:srgbClr val="BFD3FF"/>
-                </a:solidFill>
-                <a:latin typeface="Segoe UI"/>
-              </a:rPr>
-              <a:t>ПРИНЦИП РАБОТЫ</a:t>
-            </a:r>
-          </a:p>
-          <a:p>
-            <a:pPr algn="l">
-              <a:spcAft>
-                <a:spcPts val="0"/>
-              </a:spcAft>
-            </a:pPr>
-            <a:r>
-              <a:rPr sz="3000" b="1" i="0">
-                <a:solidFill>
-                  <a:srgbClr val="FFFFFF"/>
-                </a:solidFill>
-                <a:latin typeface="Segoe UI"/>
-              </a:rPr>
-              <a:t>Как устроен поиск</a:t>
-            </a:r>
-          </a:p>
-        </p:txBody>
-      </p:sp>
-      <p:sp>
-        <p:nvSpPr>
-          <p:cNvPr id="6" name="TextBox 5"/>
-          <p:cNvSpPr txBox="1"/>
-          <p:nvPr/>
-        </p:nvSpPr>
-        <p:spPr>
-          <a:xfrm>
-            <a:off x="640080" y="1828800"/>
-            <a:ext cx="10881360" cy="4389120"/>
-          </a:xfrm>
-          <a:prstGeom prst="rect">
-            <a:avLst/>
-          </a:prstGeom>
-          <a:noFill/>
-        </p:spPr>
-        <p:txBody>
-          <a:bodyPr wrap="square" anchor="t" lIns="0" rIns="0" tIns="0" bIns="0">
-            <a:spAutoFit/>
-          </a:bodyPr>
-          <a:lstStyle/>
-          <a:p>
-            <a:pPr>
-              <a:spcAft>
-                <a:spcPts val="1500"/>
-              </a:spcAft>
-            </a:pPr>
-            <a:r>
-              <a:rPr sz="1800" b="1" i="0">
-                <a:solidFill>
-                  <a:srgbClr val="2563EB"/>
-                </a:solidFill>
-                <a:latin typeface="Segoe UI"/>
-              </a:rPr>
-              <a:t>▸  </a:t>
-            </a:r>
-            <a:r>
-              <a:rPr sz="1800" b="1" i="0">
-                <a:solidFill>
-                  <a:srgbClr val="1F2430"/>
-                </a:solidFill>
-                <a:latin typeface="Segoe UI"/>
-              </a:rPr>
-              <a:t>1. Загрузка и валидация</a:t>
-            </a:r>
-            <a:r>
-              <a:rPr sz="1700" b="0" i="0">
-                <a:solidFill>
-                  <a:srgbClr val="6B7280"/>
-                </a:solidFill>
-                <a:latin typeface="Segoe UI"/>
-              </a:rPr>
-              <a:t>  —  проверка формата и размера, генерация UUID документа</a:t>
-            </a:r>
-          </a:p>
-          <a:p>
-            <a:pPr>
-              <a:spcAft>
-                <a:spcPts val="1500"/>
-              </a:spcAft>
-            </a:pPr>
-            <a:r>
-              <a:rPr sz="1800" b="1" i="0">
-                <a:solidFill>
-                  <a:srgbClr val="2563EB"/>
-                </a:solidFill>
-                <a:latin typeface="Segoe UI"/>
-              </a:rPr>
-              <a:t>▸  </a:t>
-            </a:r>
-            <a:r>
-              <a:rPr sz="1800" b="1" i="0">
-                <a:solidFill>
-                  <a:srgbClr val="1F2430"/>
-                </a:solidFill>
-                <a:latin typeface="Segoe UI"/>
-              </a:rPr>
-              <a:t>2. Извлечение текста</a:t>
-            </a:r>
-            <a:r>
-              <a:rPr sz="1700" b="0" i="0">
-                <a:solidFill>
-                  <a:srgbClr val="6B7280"/>
-                </a:solidFill>
-                <a:latin typeface="Segoe UI"/>
-              </a:rPr>
-              <a:t>  —  pdfplumber (PDF) и python-docx (DOCX)</a:t>
-            </a:r>
-          </a:p>
-          <a:p>
-            <a:pPr>
-              <a:spcAft>
-                <a:spcPts val="1500"/>
-              </a:spcAft>
-            </a:pPr>
-            <a:r>
-              <a:rPr sz="1800" b="1" i="0">
-                <a:solidFill>
-                  <a:srgbClr val="2563EB"/>
-                </a:solidFill>
-                <a:latin typeface="Segoe UI"/>
-              </a:rPr>
-              <a:t>▸  </a:t>
-            </a:r>
-            <a:r>
-              <a:rPr sz="1800" b="1" i="0">
-                <a:solidFill>
-                  <a:srgbClr val="1F2430"/>
-                </a:solidFill>
-                <a:latin typeface="Segoe UI"/>
-              </a:rPr>
-              <a:t>3. Разбиение на чанки</a:t>
-            </a:r>
-            <a:r>
-              <a:rPr sz="1700" b="0" i="0">
-                <a:solidFill>
-                  <a:srgbClr val="6B7280"/>
-                </a:solidFill>
-                <a:latin typeface="Segoe UI"/>
-              </a:rPr>
-              <a:t>  —  сегменты по 1000 символов с перекрытием 100</a:t>
-            </a:r>
-          </a:p>
-          <a:p>
-            <a:pPr>
-              <a:spcAft>
-                <a:spcPts val="1500"/>
-              </a:spcAft>
-            </a:pPr>
-            <a:r>
-              <a:rPr sz="1800" b="1" i="0">
-                <a:solidFill>
-                  <a:srgbClr val="2563EB"/>
-                </a:solidFill>
-                <a:latin typeface="Segoe UI"/>
-              </a:rPr>
-              <a:t>▸  </a:t>
-            </a:r>
-            <a:r>
-              <a:rPr sz="1800" b="1" i="0">
-                <a:solidFill>
-                  <a:srgbClr val="1F2430"/>
-                </a:solidFill>
-                <a:latin typeface="Segoe UI"/>
-              </a:rPr>
-              <a:t>4. Индексация в Elasticsearch</a:t>
-            </a:r>
-            <a:r>
-              <a:rPr sz="1700" b="0" i="0">
-                <a:solidFill>
-                  <a:srgbClr val="6B7280"/>
-                </a:solidFill>
-                <a:latin typeface="Segoe UI"/>
-              </a:rPr>
-              <a:t>  —  русскоязычный анализатор, метаданные чанков</a:t>
-            </a:r>
-          </a:p>
-          <a:p>
-            <a:pPr>
-              <a:spcAft>
-                <a:spcPts val="1500"/>
-              </a:spcAft>
-            </a:pPr>
-            <a:r>
-              <a:rPr sz="1800" b="1" i="0">
-                <a:solidFill>
-                  <a:srgbClr val="2563EB"/>
-                </a:solidFill>
-                <a:latin typeface="Segoe UI"/>
-              </a:rPr>
-              <a:t>▸  </a:t>
-            </a:r>
-            <a:r>
-              <a:rPr sz="1800" b="1" i="0">
-                <a:solidFill>
-                  <a:srgbClr val="1F2430"/>
-                </a:solidFill>
-                <a:latin typeface="Segoe UI"/>
-              </a:rPr>
-              <a:t>5. Поиск multi_match</a:t>
-            </a:r>
-            <a:r>
-              <a:rPr sz="1700" b="0" i="0">
-                <a:solidFill>
-                  <a:srgbClr val="6B7280"/>
-                </a:solidFill>
-                <a:latin typeface="Segoe UI"/>
-              </a:rPr>
-              <a:t>  —  ранжирование результатов по релевантности (score)</a:t>
-            </a:r>
-          </a:p>
-          <a:p>
-            <a:pPr>
-              <a:spcAft>
-                <a:spcPts val="1500"/>
-              </a:spcAft>
-            </a:pPr>
-            <a:r>
-              <a:rPr sz="1800" b="1" i="0">
-                <a:solidFill>
-                  <a:srgbClr val="2563EB"/>
-                </a:solidFill>
-                <a:latin typeface="Segoe UI"/>
-              </a:rPr>
-              <a:t>▸  </a:t>
-            </a:r>
-            <a:r>
-              <a:rPr sz="1800" b="1" i="0">
-                <a:solidFill>
-                  <a:srgbClr val="1F2430"/>
-                </a:solidFill>
-                <a:latin typeface="Segoe UI"/>
-              </a:rPr>
-              <a:t>6. Выдача результатов</a:t>
-            </a:r>
-            <a:r>
-              <a:rPr sz="1700" b="0" i="0">
-                <a:solidFill>
-                  <a:srgbClr val="6B7280"/>
-                </a:solidFill>
-                <a:latin typeface="Segoe UI"/>
-              </a:rPr>
-              <a:t>  —  подсветка совпадений, пагинация, кеш (TTL 5 мин)</a:t>
-            </a:r>
-          </a:p>
-        </p:txBody>
-      </p:sp>
-    </p:spTree>
-  </p:cSld>
-  <p:clrMapOvr>
-    <a:masterClrMapping/>
-  </p:clrMapOvr>
-</p:sld>
-</file>
-
 <file path=ppt/slides/slide5.xml><?xml version="1.0" encoding="utf-8"?>
 <p:sld xmlns:a="http://schemas.openxmlformats.org/drawingml/2006/main" xmlns:p="http://schemas.openxmlformats.org/presentationml/2006/main" xmlns:r="http://schemas.openxmlformats.org/officeDocument/2006/relationships">
   <p:cSld>
@@ -6529,6 +5299,654 @@
                 <a:latin typeface="Segoe UI"/>
               </a:rPr>
               <a:t>API и документация:  http://localhost:8000/docs</a:t>
+            </a:r>
+          </a:p>
+        </p:txBody>
+      </p:sp>
+    </p:spTree>
+  </p:cSld>
+  <p:clrMapOvr>
+    <a:masterClrMapping/>
+  </p:clrMapOvr>
+</p:sld>
+</file>
+
+<file path=ppt/slides/slide8.xml><?xml version="1.0" encoding="utf-8"?>
+<p:sld xmlns:a="http://schemas.openxmlformats.org/drawingml/2006/main" xmlns:p="http://schemas.openxmlformats.org/presentationml/2006/main" xmlns:r="http://schemas.openxmlformats.org/officeDocument/2006/relationships">
+  <p:cSld>
+    <p:spTree>
+      <p:nvGrpSpPr>
+        <p:cNvPr id="1" name=""/>
+        <p:cNvGrpSpPr/>
+        <p:nvPr/>
+      </p:nvGrpSpPr>
+      <p:grpSpPr/>
+      <p:sp>
+        <p:nvSpPr>
+          <p:cNvPr id="2" name="Rectangle 1"/>
+          <p:cNvSpPr/>
+          <p:nvPr/>
+        </p:nvSpPr>
+        <p:spPr>
+          <a:xfrm>
+            <a:off x="0" y="0"/>
+            <a:ext cx="12191695" cy="6858000"/>
+          </a:xfrm>
+          <a:prstGeom prst="rect">
+            <a:avLst/>
+          </a:prstGeom>
+          <a:solidFill>
+            <a:srgbClr val="FFFFFF"/>
+          </a:solidFill>
+          <a:ln>
+            <a:noFill/>
+          </a:ln>
+          <a:effectLst/>
+        </p:spPr>
+        <p:style>
+          <a:lnRef idx="1">
+            <a:schemeClr val="accent1"/>
+          </a:lnRef>
+          <a:fillRef idx="3">
+            <a:schemeClr val="accent1"/>
+          </a:fillRef>
+          <a:effectRef idx="2">
+            <a:schemeClr val="accent1"/>
+          </a:effectRef>
+          <a:fontRef idx="minor">
+            <a:schemeClr val="lt1"/>
+          </a:fontRef>
+        </p:style>
+        <p:txBody>
+          <a:bodyPr rtlCol="0" anchor="ctr"/>
+          <a:lstStyle/>
+          <a:p>
+            <a:pPr algn="ctr"/>
+          </a:p>
+        </p:txBody>
+      </p:sp>
+      <p:sp>
+        <p:nvSpPr>
+          <p:cNvPr id="3" name="Rectangle 2"/>
+          <p:cNvSpPr/>
+          <p:nvPr/>
+        </p:nvSpPr>
+        <p:spPr>
+          <a:xfrm>
+            <a:off x="0" y="0"/>
+            <a:ext cx="12191695" cy="1371600"/>
+          </a:xfrm>
+          <a:prstGeom prst="rect">
+            <a:avLst/>
+          </a:prstGeom>
+          <a:solidFill>
+            <a:srgbClr val="2563EB"/>
+          </a:solidFill>
+          <a:ln>
+            <a:noFill/>
+          </a:ln>
+          <a:effectLst/>
+        </p:spPr>
+        <p:style>
+          <a:lnRef idx="1">
+            <a:schemeClr val="accent1"/>
+          </a:lnRef>
+          <a:fillRef idx="3">
+            <a:schemeClr val="accent1"/>
+          </a:fillRef>
+          <a:effectRef idx="2">
+            <a:schemeClr val="accent1"/>
+          </a:effectRef>
+          <a:fontRef idx="minor">
+            <a:schemeClr val="lt1"/>
+          </a:fontRef>
+        </p:style>
+        <p:txBody>
+          <a:bodyPr rtlCol="0" anchor="ctr"/>
+          <a:lstStyle/>
+          <a:p>
+            <a:pPr algn="ctr"/>
+          </a:p>
+        </p:txBody>
+      </p:sp>
+      <p:sp>
+        <p:nvSpPr>
+          <p:cNvPr id="4" name="Rectangle 3"/>
+          <p:cNvSpPr/>
+          <p:nvPr/>
+        </p:nvSpPr>
+        <p:spPr>
+          <a:xfrm>
+            <a:off x="0" y="1371600"/>
+            <a:ext cx="12191695" cy="50800"/>
+          </a:xfrm>
+          <a:prstGeom prst="rect">
+            <a:avLst/>
+          </a:prstGeom>
+          <a:solidFill>
+            <a:srgbClr val="1D4ED8"/>
+          </a:solidFill>
+          <a:ln>
+            <a:noFill/>
+          </a:ln>
+          <a:effectLst/>
+        </p:spPr>
+        <p:style>
+          <a:lnRef idx="1">
+            <a:schemeClr val="accent1"/>
+          </a:lnRef>
+          <a:fillRef idx="3">
+            <a:schemeClr val="accent1"/>
+          </a:fillRef>
+          <a:effectRef idx="2">
+            <a:schemeClr val="accent1"/>
+          </a:effectRef>
+          <a:fontRef idx="minor">
+            <a:schemeClr val="lt1"/>
+          </a:fontRef>
+        </p:style>
+        <p:txBody>
+          <a:bodyPr rtlCol="0" anchor="ctr"/>
+          <a:lstStyle/>
+          <a:p>
+            <a:pPr algn="ctr"/>
+          </a:p>
+        </p:txBody>
+      </p:sp>
+      <p:sp>
+        <p:nvSpPr>
+          <p:cNvPr id="5" name="TextBox 4"/>
+          <p:cNvSpPr txBox="1"/>
+          <p:nvPr/>
+        </p:nvSpPr>
+        <p:spPr>
+          <a:xfrm>
+            <a:off x="640080" y="256032"/>
+            <a:ext cx="10972800" cy="914400"/>
+          </a:xfrm>
+          <a:prstGeom prst="rect">
+            <a:avLst/>
+          </a:prstGeom>
+          <a:noFill/>
+        </p:spPr>
+        <p:txBody>
+          <a:bodyPr wrap="square" anchor="t" lIns="0" rIns="0" tIns="0" bIns="0">
+            <a:spAutoFit/>
+          </a:bodyPr>
+          <a:lstStyle/>
+          <a:p>
+            <a:pPr algn="l">
+              <a:spcAft>
+                <a:spcPts val="200"/>
+              </a:spcAft>
+            </a:pPr>
+            <a:r>
+              <a:rPr sz="1200" b="1" i="0">
+                <a:solidFill>
+                  <a:srgbClr val="BFD3FF"/>
+                </a:solidFill>
+                <a:latin typeface="Segoe UI"/>
+              </a:rPr>
+              <a:t>СЕРВЕРНАЯ ЧАСТЬ</a:t>
+            </a:r>
+          </a:p>
+          <a:p>
+            <a:pPr algn="l">
+              <a:spcAft>
+                <a:spcPts val="0"/>
+              </a:spcAft>
+            </a:pPr>
+            <a:r>
+              <a:rPr sz="3000" b="1" i="0">
+                <a:solidFill>
+                  <a:srgbClr val="FFFFFF"/>
+                </a:solidFill>
+                <a:latin typeface="Segoe UI"/>
+              </a:rPr>
+              <a:t>Backend: API, индексация, поиск</a:t>
+            </a:r>
+          </a:p>
+        </p:txBody>
+      </p:sp>
+      <p:sp>
+        <p:nvSpPr>
+          <p:cNvPr id="6" name="TextBox 5"/>
+          <p:cNvSpPr txBox="1"/>
+          <p:nvPr/>
+        </p:nvSpPr>
+        <p:spPr>
+          <a:xfrm>
+            <a:off x="640080" y="1828800"/>
+            <a:ext cx="10881360" cy="4389120"/>
+          </a:xfrm>
+          <a:prstGeom prst="rect">
+            <a:avLst/>
+          </a:prstGeom>
+          <a:noFill/>
+        </p:spPr>
+        <p:txBody>
+          <a:bodyPr wrap="square" anchor="t" lIns="0" rIns="0" tIns="0" bIns="0">
+            <a:spAutoFit/>
+          </a:bodyPr>
+          <a:lstStyle/>
+          <a:p>
+            <a:pPr>
+              <a:spcAft>
+                <a:spcPts val="1400"/>
+              </a:spcAft>
+            </a:pPr>
+            <a:r>
+              <a:rPr sz="1800" b="1" i="0">
+                <a:solidFill>
+                  <a:srgbClr val="2563EB"/>
+                </a:solidFill>
+                <a:latin typeface="Segoe UI"/>
+              </a:rPr>
+              <a:t>▸  REST API (FastAPI)  —  загрузка, поиск, история; документация OpenAPI / Swagger</a:t>
+            </a:r>
+          </a:p>
+          <a:p>
+            <a:pPr>
+              <a:spcAft>
+                <a:spcPts val="1400"/>
+              </a:spcAft>
+            </a:pPr>
+            <a:r>
+              <a:rPr sz="1800" b="1" i="0">
+                <a:solidFill>
+                  <a:srgbClr val="2563EB"/>
+                </a:solidFill>
+                <a:latin typeface="Segoe UI"/>
+              </a:rPr>
+              <a:t>▸  Валидация файлов  —  формат PDF/DOCX и размер до 20 МБ, генерация UUID документа</a:t>
+            </a:r>
+          </a:p>
+          <a:p>
+            <a:pPr>
+              <a:spcAft>
+                <a:spcPts val="1400"/>
+              </a:spcAft>
+            </a:pPr>
+            <a:r>
+              <a:rPr sz="1800" b="1" i="0">
+                <a:solidFill>
+                  <a:srgbClr val="2563EB"/>
+                </a:solidFill>
+                <a:latin typeface="Segoe UI"/>
+              </a:rPr>
+              <a:t>▸  Извлечение и чанкинг  —  pdfplumber / python-docx, сегменты по 1000 символов (перекрытие 100)</a:t>
+            </a:r>
+          </a:p>
+          <a:p>
+            <a:pPr>
+              <a:spcAft>
+                <a:spcPts val="1400"/>
+              </a:spcAft>
+            </a:pPr>
+            <a:r>
+              <a:rPr sz="1800" b="1" i="0">
+                <a:solidFill>
+                  <a:srgbClr val="2563EB"/>
+                </a:solidFill>
+                <a:latin typeface="Segoe UI"/>
+              </a:rPr>
+              <a:t>▸  Elasticsearch  —  русскоязычный анализатор, индекс documents, поиск multi_match по релевантности</a:t>
+            </a:r>
+          </a:p>
+          <a:p>
+            <a:pPr>
+              <a:spcAft>
+                <a:spcPts val="1400"/>
+              </a:spcAft>
+            </a:pPr>
+            <a:r>
+              <a:rPr sz="1800" b="1" i="0">
+                <a:solidFill>
+                  <a:srgbClr val="2563EB"/>
+                </a:solidFill>
+                <a:latin typeface="Segoe UI"/>
+              </a:rPr>
+              <a:t>▸  Кеширование (Redis)  —  повторные запросы из кеша, TTL 5 минут</a:t>
+            </a:r>
+          </a:p>
+          <a:p>
+            <a:pPr>
+              <a:spcAft>
+                <a:spcPts val="1400"/>
+              </a:spcAft>
+            </a:pPr>
+            <a:r>
+              <a:rPr sz="1800" b="1" i="0">
+                <a:solidFill>
+                  <a:srgbClr val="2563EB"/>
+                </a:solidFill>
+                <a:latin typeface="Segoe UI"/>
+              </a:rPr>
+              <a:t>▸  Хранение (PostgreSQL)  —  метаданные документов и история поисковых запросов</a:t>
+            </a:r>
+          </a:p>
+        </p:txBody>
+      </p:sp>
+    </p:spTree>
+  </p:cSld>
+  <p:clrMapOvr>
+    <a:masterClrMapping/>
+  </p:clrMapOvr>
+</p:sld>
+</file>
+
+<file path=ppt/slides/slide9.xml><?xml version="1.0" encoding="utf-8"?>
+<p:sld xmlns:a="http://schemas.openxmlformats.org/drawingml/2006/main" xmlns:p="http://schemas.openxmlformats.org/presentationml/2006/main" xmlns:r="http://schemas.openxmlformats.org/officeDocument/2006/relationships">
+  <p:cSld>
+    <p:spTree>
+      <p:nvGrpSpPr>
+        <p:cNvPr id="1" name=""/>
+        <p:cNvGrpSpPr/>
+        <p:nvPr/>
+      </p:nvGrpSpPr>
+      <p:grpSpPr/>
+      <p:sp>
+        <p:nvSpPr>
+          <p:cNvPr id="2" name="Rectangle 1"/>
+          <p:cNvSpPr/>
+          <p:nvPr/>
+        </p:nvSpPr>
+        <p:spPr>
+          <a:xfrm>
+            <a:off x="0" y="0"/>
+            <a:ext cx="12191695" cy="6858000"/>
+          </a:xfrm>
+          <a:prstGeom prst="rect">
+            <a:avLst/>
+          </a:prstGeom>
+          <a:solidFill>
+            <a:srgbClr val="FFFFFF"/>
+          </a:solidFill>
+          <a:ln>
+            <a:noFill/>
+          </a:ln>
+          <a:effectLst/>
+        </p:spPr>
+        <p:style>
+          <a:lnRef idx="1">
+            <a:schemeClr val="accent1"/>
+          </a:lnRef>
+          <a:fillRef idx="3">
+            <a:schemeClr val="accent1"/>
+          </a:fillRef>
+          <a:effectRef idx="2">
+            <a:schemeClr val="accent1"/>
+          </a:effectRef>
+          <a:fontRef idx="minor">
+            <a:schemeClr val="lt1"/>
+          </a:fontRef>
+        </p:style>
+        <p:txBody>
+          <a:bodyPr rtlCol="0" anchor="ctr"/>
+          <a:lstStyle/>
+          <a:p>
+            <a:pPr algn="ctr"/>
+          </a:p>
+        </p:txBody>
+      </p:sp>
+      <p:sp>
+        <p:nvSpPr>
+          <p:cNvPr id="3" name="Rectangle 2"/>
+          <p:cNvSpPr/>
+          <p:nvPr/>
+        </p:nvSpPr>
+        <p:spPr>
+          <a:xfrm>
+            <a:off x="0" y="0"/>
+            <a:ext cx="12191695" cy="1371600"/>
+          </a:xfrm>
+          <a:prstGeom prst="rect">
+            <a:avLst/>
+          </a:prstGeom>
+          <a:solidFill>
+            <a:srgbClr val="2563EB"/>
+          </a:solidFill>
+          <a:ln>
+            <a:noFill/>
+          </a:ln>
+          <a:effectLst/>
+        </p:spPr>
+        <p:style>
+          <a:lnRef idx="1">
+            <a:schemeClr val="accent1"/>
+          </a:lnRef>
+          <a:fillRef idx="3">
+            <a:schemeClr val="accent1"/>
+          </a:fillRef>
+          <a:effectRef idx="2">
+            <a:schemeClr val="accent1"/>
+          </a:effectRef>
+          <a:fontRef idx="minor">
+            <a:schemeClr val="lt1"/>
+          </a:fontRef>
+        </p:style>
+        <p:txBody>
+          <a:bodyPr rtlCol="0" anchor="ctr"/>
+          <a:lstStyle/>
+          <a:p>
+            <a:pPr algn="ctr"/>
+          </a:p>
+        </p:txBody>
+      </p:sp>
+      <p:sp>
+        <p:nvSpPr>
+          <p:cNvPr id="4" name="Rectangle 3"/>
+          <p:cNvSpPr/>
+          <p:nvPr/>
+        </p:nvSpPr>
+        <p:spPr>
+          <a:xfrm>
+            <a:off x="0" y="1371600"/>
+            <a:ext cx="12191695" cy="50800"/>
+          </a:xfrm>
+          <a:prstGeom prst="rect">
+            <a:avLst/>
+          </a:prstGeom>
+          <a:solidFill>
+            <a:srgbClr val="1D4ED8"/>
+          </a:solidFill>
+          <a:ln>
+            <a:noFill/>
+          </a:ln>
+          <a:effectLst/>
+        </p:spPr>
+        <p:style>
+          <a:lnRef idx="1">
+            <a:schemeClr val="accent1"/>
+          </a:lnRef>
+          <a:fillRef idx="3">
+            <a:schemeClr val="accent1"/>
+          </a:fillRef>
+          <a:effectRef idx="2">
+            <a:schemeClr val="accent1"/>
+          </a:effectRef>
+          <a:fontRef idx="minor">
+            <a:schemeClr val="lt1"/>
+          </a:fontRef>
+        </p:style>
+        <p:txBody>
+          <a:bodyPr rtlCol="0" anchor="ctr"/>
+          <a:lstStyle/>
+          <a:p>
+            <a:pPr algn="ctr"/>
+          </a:p>
+        </p:txBody>
+      </p:sp>
+      <p:sp>
+        <p:nvSpPr>
+          <p:cNvPr id="5" name="TextBox 4"/>
+          <p:cNvSpPr txBox="1"/>
+          <p:nvPr/>
+        </p:nvSpPr>
+        <p:spPr>
+          <a:xfrm>
+            <a:off x="640080" y="256032"/>
+            <a:ext cx="10972800" cy="914400"/>
+          </a:xfrm>
+          <a:prstGeom prst="rect">
+            <a:avLst/>
+          </a:prstGeom>
+          <a:noFill/>
+        </p:spPr>
+        <p:txBody>
+          <a:bodyPr wrap="square" anchor="t" lIns="0" rIns="0" tIns="0" bIns="0">
+            <a:spAutoFit/>
+          </a:bodyPr>
+          <a:lstStyle/>
+          <a:p>
+            <a:pPr algn="l">
+              <a:spcAft>
+                <a:spcPts val="200"/>
+              </a:spcAft>
+            </a:pPr>
+            <a:r>
+              <a:rPr sz="1200" b="1" i="0">
+                <a:solidFill>
+                  <a:srgbClr val="BFD3FF"/>
+                </a:solidFill>
+                <a:latin typeface="Segoe UI"/>
+              </a:rPr>
+              <a:t>ИНТЕРФЕЙС</a:t>
+            </a:r>
+          </a:p>
+          <a:p>
+            <a:pPr algn="l">
+              <a:spcAft>
+                <a:spcPts val="0"/>
+              </a:spcAft>
+            </a:pPr>
+            <a:r>
+              <a:rPr sz="3000" b="1" i="0">
+                <a:solidFill>
+                  <a:srgbClr val="FFFFFF"/>
+                </a:solidFill>
+                <a:latin typeface="Segoe UI"/>
+              </a:rPr>
+              <a:t>Frontend: клиентская часть</a:t>
+            </a:r>
+          </a:p>
+        </p:txBody>
+      </p:sp>
+      <p:sp>
+        <p:nvSpPr>
+          <p:cNvPr id="6" name="TextBox 5"/>
+          <p:cNvSpPr txBox="1"/>
+          <p:nvPr/>
+        </p:nvSpPr>
+        <p:spPr>
+          <a:xfrm>
+            <a:off x="640080" y="1828800"/>
+            <a:ext cx="10881360" cy="4389120"/>
+          </a:xfrm>
+          <a:prstGeom prst="rect">
+            <a:avLst/>
+          </a:prstGeom>
+          <a:noFill/>
+        </p:spPr>
+        <p:txBody>
+          <a:bodyPr wrap="square" anchor="t" lIns="0" rIns="0" tIns="0" bIns="0">
+            <a:spAutoFit/>
+          </a:bodyPr>
+          <a:lstStyle/>
+          <a:p>
+            <a:pPr>
+              <a:spcAft>
+                <a:spcPts val="1400"/>
+              </a:spcAft>
+            </a:pPr>
+            <a:r>
+              <a:rPr sz="1800" b="1" i="0">
+                <a:solidFill>
+                  <a:srgbClr val="2563EB"/>
+                </a:solidFill>
+                <a:latin typeface="Segoe UI"/>
+              </a:rPr>
+              <a:t>▸  Загрузка (Drag-and-Drop)  —  множественная загрузка, прогресс и статусы каждого файла</a:t>
+            </a:r>
+          </a:p>
+          <a:p>
+            <a:pPr>
+              <a:spcAft>
+                <a:spcPts val="1400"/>
+              </a:spcAft>
+            </a:pPr>
+            <a:r>
+              <a:rPr sz="1800" b="1" i="0">
+                <a:solidFill>
+                  <a:srgbClr val="2563EB"/>
+                </a:solidFill>
+                <a:latin typeface="Segoe UI"/>
+              </a:rPr>
+              <a:t>▸  Список документов  —  название, дата загрузки, статус индексации</a:t>
+            </a:r>
+          </a:p>
+          <a:p>
+            <a:pPr>
+              <a:spcAft>
+                <a:spcPts val="1400"/>
+              </a:spcAft>
+            </a:pPr>
+            <a:r>
+              <a:rPr sz="1800" b="1" i="0">
+                <a:solidFill>
+                  <a:srgbClr val="2563EB"/>
+                </a:solidFill>
+                <a:latin typeface="Segoe UI"/>
+              </a:rPr>
+              <a:t>▸  Поиск  —  поле ввода с кнопкой «Найти» и запуском по клавише Enter</a:t>
+            </a:r>
+          </a:p>
+          <a:p>
+            <a:pPr>
+              <a:spcAft>
+                <a:spcPts val="1400"/>
+              </a:spcAft>
+            </a:pPr>
+            <a:r>
+              <a:rPr sz="1800" b="1" i="0">
+                <a:solidFill>
+                  <a:srgbClr val="2563EB"/>
+                </a:solidFill>
+                <a:latin typeface="Segoe UI"/>
+              </a:rPr>
+              <a:t>▸  Карточки результатов  —  имя файла, номер страницы, фрагмент, оценка релевантности</a:t>
+            </a:r>
+          </a:p>
+          <a:p>
+            <a:pPr>
+              <a:spcAft>
+                <a:spcPts val="1400"/>
+              </a:spcAft>
+            </a:pPr>
+            <a:r>
+              <a:rPr sz="1800" b="1" i="0">
+                <a:solidFill>
+                  <a:srgbClr val="2563EB"/>
+                </a:solidFill>
+                <a:latin typeface="Segoe UI"/>
+              </a:rPr>
+              <a:t>▸  Подсветка совпадений  —  выделение найденных слов жёлтым фоном</a:t>
+            </a:r>
+          </a:p>
+          <a:p>
+            <a:pPr>
+              <a:spcAft>
+                <a:spcPts val="1400"/>
+              </a:spcAft>
+            </a:pPr>
+            <a:r>
+              <a:rPr sz="1800" b="1" i="0">
+                <a:solidFill>
+                  <a:srgbClr val="2563EB"/>
+                </a:solidFill>
+                <a:latin typeface="Segoe UI"/>
+              </a:rPr>
+              <a:t>▸  Пагинация и адаптив  —  по 10 результатов, экраны 320–1920px; React + TypeScript</a:t>
             </a:r>
           </a:p>
         </p:txBody>
